--- a/artifacts/DeckChatbot.pptx
+++ b/artifacts/DeckChatbot.pptx
@@ -6,12 +6,20 @@
   </p:sldMasterIdLst>
   <p:sldIdLst>
     <p:sldId id="256" r:id="rId2"/>
-    <p:sldId id="258" r:id="rId3"/>
-    <p:sldId id="257" r:id="rId4"/>
-    <p:sldId id="259" r:id="rId5"/>
-    <p:sldId id="260" r:id="rId6"/>
-    <p:sldId id="261" r:id="rId7"/>
-    <p:sldId id="262" r:id="rId8"/>
+    <p:sldId id="263" r:id="rId3"/>
+    <p:sldId id="265" r:id="rId4"/>
+    <p:sldId id="264" r:id="rId5"/>
+    <p:sldId id="267" r:id="rId6"/>
+    <p:sldId id="268" r:id="rId7"/>
+    <p:sldId id="269" r:id="rId8"/>
+    <p:sldId id="271" r:id="rId9"/>
+    <p:sldId id="259" r:id="rId10"/>
+    <p:sldId id="257" r:id="rId11"/>
+    <p:sldId id="272" r:id="rId12"/>
+    <p:sldId id="260" r:id="rId13"/>
+    <p:sldId id="261" r:id="rId14"/>
+    <p:sldId id="273" r:id="rId15"/>
+    <p:sldId id="262" r:id="rId16"/>
   </p:sldIdLst>
   <p:sldSz cx="12192000" cy="6858000"/>
   <p:notesSz cx="6858000" cy="9144000"/>
@@ -110,6 +118,11 @@
       </a:defRPr>
     </a:lvl9pPr>
   </p:defaultTextStyle>
+  <p:extLst>
+    <p:ext uri="{EFAFB233-063F-42B5-8137-9DF3F51BA10A}">
+      <p15:sldGuideLst xmlns:p15="http://schemas.microsoft.com/office/powerpoint/2012/main"/>
+    </p:ext>
+  </p:extLst>
 </p:presentation>
 </file>
 
@@ -244,7 +257,7 @@
           <a:p>
             <a:fld id="{13677532-D479-4C35-BD9A-E8CAA5A029F4}" type="datetimeFigureOut">
               <a:rPr lang="en-US" smtClean="0"/>
-              <a:t>3/15/2026</a:t>
+              <a:t>3/16/2026</a:t>
             </a:fld>
             <a:endParaRPr lang="en-US"/>
           </a:p>
@@ -414,7 +427,7 @@
           <a:p>
             <a:fld id="{13677532-D479-4C35-BD9A-E8CAA5A029F4}" type="datetimeFigureOut">
               <a:rPr lang="en-US" smtClean="0"/>
-              <a:t>3/15/2026</a:t>
+              <a:t>3/16/2026</a:t>
             </a:fld>
             <a:endParaRPr lang="en-US"/>
           </a:p>
@@ -594,7 +607,7 @@
           <a:p>
             <a:fld id="{13677532-D479-4C35-BD9A-E8CAA5A029F4}" type="datetimeFigureOut">
               <a:rPr lang="en-US" smtClean="0"/>
-              <a:t>3/15/2026</a:t>
+              <a:t>3/16/2026</a:t>
             </a:fld>
             <a:endParaRPr lang="en-US"/>
           </a:p>
@@ -764,7 +777,7 @@
           <a:p>
             <a:fld id="{13677532-D479-4C35-BD9A-E8CAA5A029F4}" type="datetimeFigureOut">
               <a:rPr lang="en-US" smtClean="0"/>
-              <a:t>3/15/2026</a:t>
+              <a:t>3/16/2026</a:t>
             </a:fld>
             <a:endParaRPr lang="en-US"/>
           </a:p>
@@ -1010,7 +1023,7 @@
           <a:p>
             <a:fld id="{13677532-D479-4C35-BD9A-E8CAA5A029F4}" type="datetimeFigureOut">
               <a:rPr lang="en-US" smtClean="0"/>
-              <a:t>3/15/2026</a:t>
+              <a:t>3/16/2026</a:t>
             </a:fld>
             <a:endParaRPr lang="en-US"/>
           </a:p>
@@ -1242,7 +1255,7 @@
           <a:p>
             <a:fld id="{13677532-D479-4C35-BD9A-E8CAA5A029F4}" type="datetimeFigureOut">
               <a:rPr lang="en-US" smtClean="0"/>
-              <a:t>3/15/2026</a:t>
+              <a:t>3/16/2026</a:t>
             </a:fld>
             <a:endParaRPr lang="en-US"/>
           </a:p>
@@ -1609,7 +1622,7 @@
           <a:p>
             <a:fld id="{13677532-D479-4C35-BD9A-E8CAA5A029F4}" type="datetimeFigureOut">
               <a:rPr lang="en-US" smtClean="0"/>
-              <a:t>3/15/2026</a:t>
+              <a:t>3/16/2026</a:t>
             </a:fld>
             <a:endParaRPr lang="en-US"/>
           </a:p>
@@ -1727,7 +1740,7 @@
           <a:p>
             <a:fld id="{13677532-D479-4C35-BD9A-E8CAA5A029F4}" type="datetimeFigureOut">
               <a:rPr lang="en-US" smtClean="0"/>
-              <a:t>3/15/2026</a:t>
+              <a:t>3/16/2026</a:t>
             </a:fld>
             <a:endParaRPr lang="en-US"/>
           </a:p>
@@ -1822,7 +1835,7 @@
           <a:p>
             <a:fld id="{13677532-D479-4C35-BD9A-E8CAA5A029F4}" type="datetimeFigureOut">
               <a:rPr lang="en-US" smtClean="0"/>
-              <a:t>3/15/2026</a:t>
+              <a:t>3/16/2026</a:t>
             </a:fld>
             <a:endParaRPr lang="en-US"/>
           </a:p>
@@ -2099,7 +2112,7 @@
           <a:p>
             <a:fld id="{13677532-D479-4C35-BD9A-E8CAA5A029F4}" type="datetimeFigureOut">
               <a:rPr lang="en-US" smtClean="0"/>
-              <a:t>3/15/2026</a:t>
+              <a:t>3/16/2026</a:t>
             </a:fld>
             <a:endParaRPr lang="en-US"/>
           </a:p>
@@ -2352,7 +2365,7 @@
           <a:p>
             <a:fld id="{13677532-D479-4C35-BD9A-E8CAA5A029F4}" type="datetimeFigureOut">
               <a:rPr lang="en-US" smtClean="0"/>
-              <a:t>3/15/2026</a:t>
+              <a:t>3/16/2026</a:t>
             </a:fld>
             <a:endParaRPr lang="en-US"/>
           </a:p>
@@ -2565,7 +2578,7 @@
           <a:p>
             <a:fld id="{13677532-D479-4C35-BD9A-E8CAA5A029F4}" type="datetimeFigureOut">
               <a:rPr lang="en-US" smtClean="0"/>
-              <a:t>3/15/2026</a:t>
+              <a:t>3/16/2026</a:t>
             </a:fld>
             <a:endParaRPr lang="en-US"/>
           </a:p>
@@ -3045,112 +3058,7 @@
 </p:sld>
 </file>
 
-<file path=ppt/slides/slide2.xml><?xml version="1.0" encoding="utf-8"?>
-<p:sld xmlns:a="http://schemas.openxmlformats.org/drawingml/2006/main" xmlns:r="http://schemas.openxmlformats.org/officeDocument/2006/relationships" xmlns:p="http://schemas.openxmlformats.org/presentationml/2006/main">
-  <p:cSld>
-    <p:spTree>
-      <p:nvGrpSpPr>
-        <p:cNvPr id="1" name=""/>
-        <p:cNvGrpSpPr/>
-        <p:nvPr/>
-      </p:nvGrpSpPr>
-      <p:grpSpPr>
-        <a:xfrm>
-          <a:off x="0" y="0"/>
-          <a:ext cx="0" cy="0"/>
-          <a:chOff x="0" y="0"/>
-          <a:chExt cx="0" cy="0"/>
-        </a:xfrm>
-      </p:grpSpPr>
-      <p:sp>
-        <p:nvSpPr>
-          <p:cNvPr id="2" name="Cím 1"/>
-          <p:cNvSpPr>
-            <a:spLocks noGrp="1"/>
-          </p:cNvSpPr>
-          <p:nvPr>
-            <p:ph type="title"/>
-          </p:nvPr>
-        </p:nvSpPr>
-        <p:spPr>
-          <a:xfrm>
-            <a:off x="838200" y="365126"/>
-            <a:ext cx="10515600" cy="642408"/>
-          </a:xfrm>
-        </p:spPr>
-        <p:txBody>
-          <a:bodyPr>
-            <a:normAutofit fontScale="90000"/>
-          </a:bodyPr>
-          <a:lstStyle/>
-          <a:p>
-            <a:r>
-              <a:rPr lang="hu-HU" dirty="0" err="1" smtClean="0"/>
-              <a:t>Stage</a:t>
-            </a:r>
-            <a:r>
-              <a:rPr lang="hu-HU" dirty="0" smtClean="0"/>
-              <a:t> 2 – </a:t>
-            </a:r>
-            <a:r>
-              <a:rPr lang="hu-HU" dirty="0" err="1" smtClean="0"/>
-              <a:t>User</a:t>
-            </a:r>
-            <a:r>
-              <a:rPr lang="hu-HU" dirty="0" smtClean="0"/>
-              <a:t> input </a:t>
-            </a:r>
-            <a:r>
-              <a:rPr lang="hu-HU" dirty="0" err="1" smtClean="0"/>
-              <a:t>handling</a:t>
-            </a:r>
-            <a:endParaRPr lang="en-US" dirty="0"/>
-          </a:p>
-        </p:txBody>
-      </p:sp>
-      <p:pic>
-        <p:nvPicPr>
-          <p:cNvPr id="7" name="Tartalom helye 6"/>
-          <p:cNvPicPr>
-            <a:picLocks noGrp="1" noChangeAspect="1"/>
-          </p:cNvPicPr>
-          <p:nvPr>
-            <p:ph idx="1"/>
-          </p:nvPr>
-        </p:nvPicPr>
-        <p:blipFill>
-          <a:blip r:embed="rId2" cstate="print">
-            <a:extLst>
-              <a:ext uri="{28A0092B-C50C-407E-A947-70E740481C1C}">
-                <a14:useLocalDpi xmlns:a14="http://schemas.microsoft.com/office/drawing/2010/main" val="0"/>
-              </a:ext>
-            </a:extLst>
-          </a:blip>
-          <a:stretch>
-            <a:fillRect/>
-          </a:stretch>
-        </p:blipFill>
-        <p:spPr>
-          <a:xfrm>
-            <a:off x="2609850" y="1825625"/>
-            <a:ext cx="5925116" cy="4351338"/>
-          </a:xfrm>
-        </p:spPr>
-      </p:pic>
-    </p:spTree>
-    <p:extLst>
-      <p:ext uri="{BB962C8B-B14F-4D97-AF65-F5344CB8AC3E}">
-        <p14:creationId xmlns:p14="http://schemas.microsoft.com/office/powerpoint/2010/main" val="1413100697"/>
-      </p:ext>
-    </p:extLst>
-  </p:cSld>
-  <p:clrMapOvr>
-    <a:masterClrMapping/>
-  </p:clrMapOvr>
-</p:sld>
-</file>
-
-<file path=ppt/slides/slide3.xml><?xml version="1.0" encoding="utf-8"?>
+<file path=ppt/slides/slide10.xml><?xml version="1.0" encoding="utf-8"?>
 <p:sld xmlns:a="http://schemas.openxmlformats.org/drawingml/2006/main" xmlns:r="http://schemas.openxmlformats.org/officeDocument/2006/relationships" xmlns:p="http://schemas.openxmlformats.org/presentationml/2006/main">
   <p:cSld>
     <p:spTree>
@@ -3255,7 +3163,7 @@
 </p:sld>
 </file>
 
-<file path=ppt/slides/slide4.xml><?xml version="1.0" encoding="utf-8"?>
+<file path=ppt/slides/slide11.xml><?xml version="1.0" encoding="utf-8"?>
 <p:sld xmlns:a="http://schemas.openxmlformats.org/drawingml/2006/main" xmlns:r="http://schemas.openxmlformats.org/officeDocument/2006/relationships" xmlns:p="http://schemas.openxmlformats.org/presentationml/2006/main">
   <p:cSld>
     <p:spTree>
@@ -3294,67 +3202,100 @@
           </a:bodyPr>
           <a:lstStyle/>
           <a:p>
+            <a:pPr algn="ctr"/>
             <a:r>
               <a:rPr lang="hu-HU" dirty="0" err="1" smtClean="0"/>
               <a:t>Stage</a:t>
             </a:r>
             <a:r>
               <a:rPr lang="hu-HU" dirty="0" smtClean="0"/>
-              <a:t> 2 – </a:t>
-            </a:r>
-            <a:r>
-              <a:rPr lang="hu-HU" dirty="0" err="1" smtClean="0"/>
-              <a:t>Sending</a:t>
-            </a:r>
-            <a:r>
-              <a:rPr lang="hu-HU" dirty="0" smtClean="0"/>
-              <a:t> email </a:t>
-            </a:r>
-            <a:r>
-              <a:rPr lang="hu-HU" dirty="0" err="1" smtClean="0"/>
-              <a:t>for</a:t>
-            </a:r>
-            <a:r>
-              <a:rPr lang="hu-HU" dirty="0" smtClean="0"/>
-              <a:t> human</a:t>
+              <a:t> </a:t>
+            </a:r>
+            <a:r>
+              <a:rPr lang="hu-HU" dirty="0" smtClean="0"/>
+              <a:t>3</a:t>
             </a:r>
             <a:endParaRPr lang="en-US" dirty="0"/>
           </a:p>
         </p:txBody>
       </p:sp>
-      <p:pic>
-        <p:nvPicPr>
-          <p:cNvPr id="5" name="Tartalom helye 4"/>
-          <p:cNvPicPr>
-            <a:picLocks noGrp="1" noChangeAspect="1"/>
-          </p:cNvPicPr>
+      <p:sp>
+        <p:nvSpPr>
+          <p:cNvPr id="3" name="Tartalom helye 2"/>
+          <p:cNvSpPr>
+            <a:spLocks noGrp="1"/>
+          </p:cNvSpPr>
           <p:nvPr>
             <p:ph idx="1"/>
           </p:nvPr>
-        </p:nvPicPr>
-        <p:blipFill>
-          <a:blip r:embed="rId2">
-            <a:extLst>
-              <a:ext uri="{28A0092B-C50C-407E-A947-70E740481C1C}">
-                <a14:useLocalDpi xmlns:a14="http://schemas.microsoft.com/office/drawing/2010/main" val="0"/>
-              </a:ext>
-            </a:extLst>
-          </a:blip>
-          <a:stretch>
-            <a:fillRect/>
-          </a:stretch>
-        </p:blipFill>
-        <p:spPr>
-          <a:xfrm>
-            <a:off x="1174770" y="1825625"/>
-            <a:ext cx="9842460" cy="4351338"/>
-          </a:xfrm>
-        </p:spPr>
-      </p:pic>
+        </p:nvSpPr>
+        <p:spPr/>
+        <p:txBody>
+          <a:bodyPr/>
+          <a:lstStyle/>
+          <a:p>
+            <a:r>
+              <a:rPr lang="hu-HU" dirty="0" err="1" smtClean="0"/>
+              <a:t>Reservation</a:t>
+            </a:r>
+            <a:r>
+              <a:rPr lang="hu-HU" dirty="0" smtClean="0"/>
+              <a:t> </a:t>
+            </a:r>
+            <a:r>
+              <a:rPr lang="hu-HU" dirty="0" err="1" smtClean="0"/>
+              <a:t>through</a:t>
+            </a:r>
+            <a:r>
+              <a:rPr lang="hu-HU" dirty="0" smtClean="0"/>
+              <a:t> an MCP server</a:t>
+            </a:r>
+          </a:p>
+          <a:p>
+            <a:r>
+              <a:rPr lang="hu-HU" dirty="0" smtClean="0"/>
+              <a:t>MCP server </a:t>
+            </a:r>
+            <a:r>
+              <a:rPr lang="hu-HU" dirty="0" err="1" smtClean="0"/>
+              <a:t>saves</a:t>
+            </a:r>
+            <a:r>
+              <a:rPr lang="hu-HU" dirty="0"/>
+              <a:t> </a:t>
+            </a:r>
+            <a:r>
+              <a:rPr lang="hu-HU" dirty="0" err="1" smtClean="0"/>
+              <a:t>approved</a:t>
+            </a:r>
+            <a:r>
+              <a:rPr lang="hu-HU" dirty="0" smtClean="0"/>
+              <a:t> </a:t>
+            </a:r>
+            <a:r>
+              <a:rPr lang="hu-HU" dirty="0" err="1" smtClean="0"/>
+              <a:t>reservations</a:t>
+            </a:r>
+            <a:r>
+              <a:rPr lang="hu-HU" dirty="0" smtClean="0"/>
+              <a:t> </a:t>
+            </a:r>
+            <a:r>
+              <a:rPr lang="hu-HU" dirty="0" err="1" smtClean="0"/>
+              <a:t>to</a:t>
+            </a:r>
+            <a:r>
+              <a:rPr lang="hu-HU" dirty="0" smtClean="0"/>
+              <a:t> a text file</a:t>
+            </a:r>
+            <a:endParaRPr lang="en-US" dirty="0"/>
+          </a:p>
+        </p:txBody>
+      </p:sp>
     </p:spTree>
     <p:extLst>
       <p:ext uri="{BB962C8B-B14F-4D97-AF65-F5344CB8AC3E}">
-        <p14:creationId xmlns:p14="http://schemas.microsoft.com/office/powerpoint/2010/main" val="2928641094"/>
+        <p14:creationId xmlns:p14="http://schemas.microsoft.com/office/powerpoint/2010/main" val="912396851"/>
       </p:ext>
     </p:extLst>
   </p:cSld>
@@ -3364,7 +3305,7 @@
 </p:sld>
 </file>
 
-<file path=ppt/slides/slide5.xml><?xml version="1.0" encoding="utf-8"?>
+<file path=ppt/slides/slide12.xml><?xml version="1.0" encoding="utf-8"?>
 <p:sld xmlns:a="http://schemas.openxmlformats.org/drawingml/2006/main" xmlns:r="http://schemas.openxmlformats.org/officeDocument/2006/relationships" xmlns:p="http://schemas.openxmlformats.org/presentationml/2006/main">
   <p:cSld>
     <p:spTree>
@@ -3412,12 +3353,8 @@
               <a:t> 3 – MCP </a:t>
             </a:r>
             <a:r>
-              <a:rPr lang="hu-HU" dirty="0" err="1" smtClean="0"/>
-              <a:t>Sever</a:t>
-            </a:r>
-            <a:r>
-              <a:rPr lang="hu-HU" dirty="0" smtClean="0"/>
-              <a:t> </a:t>
+              <a:rPr lang="hu-HU" dirty="0" smtClean="0"/>
+              <a:t>Server </a:t>
             </a:r>
             <a:r>
               <a:rPr lang="hu-HU" dirty="0" err="1" smtClean="0"/>
@@ -3469,7 +3406,7 @@
 </p:sld>
 </file>
 
-<file path=ppt/slides/slide6.xml><?xml version="1.0" encoding="utf-8"?>
+<file path=ppt/slides/slide13.xml><?xml version="1.0" encoding="utf-8"?>
 <p:sld xmlns:a="http://schemas.openxmlformats.org/drawingml/2006/main" xmlns:r="http://schemas.openxmlformats.org/officeDocument/2006/relationships" xmlns:p="http://schemas.openxmlformats.org/presentationml/2006/main">
   <p:cSld>
     <p:spTree>
@@ -3586,7 +3523,123 @@
 </p:sld>
 </file>
 
-<file path=ppt/slides/slide7.xml><?xml version="1.0" encoding="utf-8"?>
+<file path=ppt/slides/slide14.xml><?xml version="1.0" encoding="utf-8"?>
+<p:sld xmlns:a="http://schemas.openxmlformats.org/drawingml/2006/main" xmlns:r="http://schemas.openxmlformats.org/officeDocument/2006/relationships" xmlns:p="http://schemas.openxmlformats.org/presentationml/2006/main">
+  <p:cSld>
+    <p:spTree>
+      <p:nvGrpSpPr>
+        <p:cNvPr id="1" name=""/>
+        <p:cNvGrpSpPr/>
+        <p:nvPr/>
+      </p:nvGrpSpPr>
+      <p:grpSpPr>
+        <a:xfrm>
+          <a:off x="0" y="0"/>
+          <a:ext cx="0" cy="0"/>
+          <a:chOff x="0" y="0"/>
+          <a:chExt cx="0" cy="0"/>
+        </a:xfrm>
+      </p:grpSpPr>
+      <p:sp>
+        <p:nvSpPr>
+          <p:cNvPr id="2" name="Cím 1"/>
+          <p:cNvSpPr>
+            <a:spLocks noGrp="1"/>
+          </p:cNvSpPr>
+          <p:nvPr>
+            <p:ph type="title"/>
+          </p:nvPr>
+        </p:nvSpPr>
+        <p:spPr>
+          <a:xfrm>
+            <a:off x="838200" y="365126"/>
+            <a:ext cx="10515600" cy="642408"/>
+          </a:xfrm>
+        </p:spPr>
+        <p:txBody>
+          <a:bodyPr>
+            <a:normAutofit fontScale="90000"/>
+          </a:bodyPr>
+          <a:lstStyle/>
+          <a:p>
+            <a:pPr algn="ctr"/>
+            <a:r>
+              <a:rPr lang="hu-HU" dirty="0" err="1" smtClean="0"/>
+              <a:t>Stage</a:t>
+            </a:r>
+            <a:r>
+              <a:rPr lang="hu-HU" dirty="0" smtClean="0"/>
+              <a:t> </a:t>
+            </a:r>
+            <a:r>
+              <a:rPr lang="hu-HU" dirty="0" smtClean="0"/>
+              <a:t>4</a:t>
+            </a:r>
+            <a:endParaRPr lang="en-US" dirty="0"/>
+          </a:p>
+        </p:txBody>
+      </p:sp>
+      <p:sp>
+        <p:nvSpPr>
+          <p:cNvPr id="3" name="Tartalom helye 2"/>
+          <p:cNvSpPr>
+            <a:spLocks noGrp="1"/>
+          </p:cNvSpPr>
+          <p:nvPr>
+            <p:ph idx="1"/>
+          </p:nvPr>
+        </p:nvSpPr>
+        <p:spPr/>
+        <p:txBody>
+          <a:bodyPr/>
+          <a:lstStyle/>
+          <a:p>
+            <a:r>
+              <a:rPr lang="hu-HU" dirty="0" err="1" smtClean="0"/>
+              <a:t>Orchestration</a:t>
+            </a:r>
+            <a:r>
+              <a:rPr lang="hu-HU" dirty="0" smtClean="0"/>
+              <a:t> is </a:t>
+            </a:r>
+            <a:r>
+              <a:rPr lang="hu-HU" dirty="0" err="1" smtClean="0"/>
+              <a:t>done</a:t>
+            </a:r>
+            <a:r>
+              <a:rPr lang="hu-HU" dirty="0" smtClean="0"/>
+              <a:t> </a:t>
+            </a:r>
+            <a:r>
+              <a:rPr lang="hu-HU" dirty="0" err="1" smtClean="0"/>
+              <a:t>by</a:t>
+            </a:r>
+            <a:r>
+              <a:rPr lang="hu-HU" dirty="0" smtClean="0"/>
+              <a:t> </a:t>
+            </a:r>
+            <a:r>
+              <a:rPr lang="hu-HU" dirty="0" err="1" smtClean="0"/>
+              <a:t>langgraph</a:t>
+            </a:r>
+            <a:endParaRPr lang="en-US" dirty="0"/>
+          </a:p>
+        </p:txBody>
+      </p:sp>
+    </p:spTree>
+    <p:extLst>
+      <p:ext uri="{BB962C8B-B14F-4D97-AF65-F5344CB8AC3E}">
+        <p14:creationId xmlns:p14="http://schemas.microsoft.com/office/powerpoint/2010/main" val="1835958951"/>
+      </p:ext>
+    </p:extLst>
+  </p:cSld>
+  <p:clrMapOvr>
+    <a:masterClrMapping/>
+  </p:clrMapOvr>
+</p:sld>
+</file>
+
+<file path=ppt/slides/slide15.xml><?xml version="1.0" encoding="utf-8"?>
 <p:sld xmlns:a="http://schemas.openxmlformats.org/drawingml/2006/main" xmlns:r="http://schemas.openxmlformats.org/officeDocument/2006/relationships" xmlns:p="http://schemas.openxmlformats.org/presentationml/2006/main">
   <p:cSld>
     <p:spTree>
@@ -3674,6 +3727,1661 @@
     <p:extLst>
       <p:ext uri="{BB962C8B-B14F-4D97-AF65-F5344CB8AC3E}">
         <p14:creationId xmlns:p14="http://schemas.microsoft.com/office/powerpoint/2010/main" val="3995984273"/>
+      </p:ext>
+    </p:extLst>
+  </p:cSld>
+  <p:clrMapOvr>
+    <a:masterClrMapping/>
+  </p:clrMapOvr>
+</p:sld>
+</file>
+
+<file path=ppt/slides/slide2.xml><?xml version="1.0" encoding="utf-8"?>
+<p:sld xmlns:a="http://schemas.openxmlformats.org/drawingml/2006/main" xmlns:r="http://schemas.openxmlformats.org/officeDocument/2006/relationships" xmlns:p="http://schemas.openxmlformats.org/presentationml/2006/main">
+  <p:cSld>
+    <p:spTree>
+      <p:nvGrpSpPr>
+        <p:cNvPr id="1" name=""/>
+        <p:cNvGrpSpPr/>
+        <p:nvPr/>
+      </p:nvGrpSpPr>
+      <p:grpSpPr>
+        <a:xfrm>
+          <a:off x="0" y="0"/>
+          <a:ext cx="0" cy="0"/>
+          <a:chOff x="0" y="0"/>
+          <a:chExt cx="0" cy="0"/>
+        </a:xfrm>
+      </p:grpSpPr>
+      <p:sp>
+        <p:nvSpPr>
+          <p:cNvPr id="2" name="Cím 1"/>
+          <p:cNvSpPr>
+            <a:spLocks noGrp="1"/>
+          </p:cNvSpPr>
+          <p:nvPr>
+            <p:ph type="title"/>
+          </p:nvPr>
+        </p:nvSpPr>
+        <p:spPr>
+          <a:xfrm>
+            <a:off x="838200" y="365126"/>
+            <a:ext cx="10515600" cy="642408"/>
+          </a:xfrm>
+        </p:spPr>
+        <p:txBody>
+          <a:bodyPr>
+            <a:normAutofit fontScale="90000"/>
+          </a:bodyPr>
+          <a:lstStyle/>
+          <a:p>
+            <a:r>
+              <a:rPr lang="hu-HU" dirty="0" err="1" smtClean="0"/>
+              <a:t>Stage</a:t>
+            </a:r>
+            <a:r>
+              <a:rPr lang="hu-HU" dirty="0" smtClean="0"/>
+              <a:t> 1 – RAG and </a:t>
+            </a:r>
+            <a:r>
+              <a:rPr lang="hu-HU" dirty="0" err="1" smtClean="0"/>
+              <a:t>basic</a:t>
+            </a:r>
+            <a:r>
+              <a:rPr lang="hu-HU" dirty="0" smtClean="0"/>
+              <a:t> </a:t>
+            </a:r>
+            <a:r>
+              <a:rPr lang="hu-HU" dirty="0" err="1" smtClean="0"/>
+              <a:t>user</a:t>
+            </a:r>
+            <a:r>
+              <a:rPr lang="hu-HU" dirty="0" smtClean="0"/>
+              <a:t> chat</a:t>
+            </a:r>
+            <a:endParaRPr lang="en-US" dirty="0"/>
+          </a:p>
+        </p:txBody>
+      </p:sp>
+      <p:sp>
+        <p:nvSpPr>
+          <p:cNvPr id="3" name="Tartalom helye 2"/>
+          <p:cNvSpPr>
+            <a:spLocks noGrp="1"/>
+          </p:cNvSpPr>
+          <p:nvPr>
+            <p:ph idx="1"/>
+          </p:nvPr>
+        </p:nvSpPr>
+        <p:spPr/>
+        <p:txBody>
+          <a:bodyPr>
+            <a:normAutofit/>
+          </a:bodyPr>
+          <a:lstStyle/>
+          <a:p>
+            <a:r>
+              <a:rPr lang="hu-HU" dirty="0" smtClean="0"/>
+              <a:t>RAG</a:t>
+            </a:r>
+          </a:p>
+          <a:p>
+            <a:pPr lvl="1"/>
+            <a:r>
+              <a:rPr lang="hu-HU" dirty="0" err="1" smtClean="0"/>
+              <a:t>Static</a:t>
+            </a:r>
+            <a:r>
+              <a:rPr lang="hu-HU" dirty="0" smtClean="0"/>
+              <a:t> </a:t>
+            </a:r>
+            <a:r>
+              <a:rPr lang="hu-HU" dirty="0" err="1" smtClean="0"/>
+              <a:t>information</a:t>
+            </a:r>
+            <a:r>
+              <a:rPr lang="hu-HU" dirty="0" smtClean="0"/>
+              <a:t> (</a:t>
+            </a:r>
+            <a:r>
+              <a:rPr lang="hu-HU" dirty="0" err="1" smtClean="0"/>
+              <a:t>like</a:t>
+            </a:r>
+            <a:r>
+              <a:rPr lang="hu-HU" dirty="0" smtClean="0"/>
+              <a:t> </a:t>
+            </a:r>
+            <a:r>
+              <a:rPr lang="hu-HU" dirty="0" err="1" smtClean="0"/>
+              <a:t>location</a:t>
+            </a:r>
+            <a:r>
+              <a:rPr lang="hu-HU" dirty="0" smtClean="0"/>
+              <a:t>, </a:t>
+            </a:r>
+            <a:r>
+              <a:rPr lang="hu-HU" dirty="0" err="1" smtClean="0"/>
+              <a:t>etc</a:t>
+            </a:r>
+            <a:r>
+              <a:rPr lang="hu-HU" dirty="0" smtClean="0"/>
+              <a:t>) </a:t>
+            </a:r>
+            <a:r>
+              <a:rPr lang="hu-HU" dirty="0" err="1" smtClean="0"/>
+              <a:t>about</a:t>
+            </a:r>
+            <a:r>
+              <a:rPr lang="hu-HU" dirty="0" smtClean="0"/>
+              <a:t> </a:t>
+            </a:r>
+            <a:r>
+              <a:rPr lang="hu-HU" dirty="0" err="1" smtClean="0"/>
+              <a:t>the</a:t>
+            </a:r>
+            <a:r>
+              <a:rPr lang="hu-HU" dirty="0" smtClean="0"/>
+              <a:t> parking </a:t>
+            </a:r>
+            <a:r>
+              <a:rPr lang="hu-HU" dirty="0" err="1" smtClean="0"/>
+              <a:t>lot</a:t>
+            </a:r>
+            <a:r>
+              <a:rPr lang="hu-HU" dirty="0" smtClean="0"/>
+              <a:t> is in a </a:t>
+            </a:r>
+            <a:r>
+              <a:rPr lang="hu-HU" dirty="0" err="1" smtClean="0"/>
+              <a:t>long</a:t>
+            </a:r>
+            <a:r>
+              <a:rPr lang="hu-HU" dirty="0" smtClean="0"/>
+              <a:t> .md file</a:t>
+            </a:r>
+          </a:p>
+          <a:p>
+            <a:pPr lvl="1"/>
+            <a:r>
+              <a:rPr lang="hu-HU" dirty="0" smtClean="0"/>
+              <a:t>During </a:t>
+            </a:r>
+            <a:r>
+              <a:rPr lang="hu-HU" dirty="0" err="1" smtClean="0"/>
+              <a:t>init</a:t>
+            </a:r>
+            <a:r>
+              <a:rPr lang="hu-HU" dirty="0" smtClean="0"/>
+              <a:t> it is </a:t>
+            </a:r>
+            <a:r>
+              <a:rPr lang="hu-HU" dirty="0" err="1" smtClean="0"/>
+              <a:t>splitted</a:t>
+            </a:r>
+            <a:r>
+              <a:rPr lang="hu-HU" dirty="0" smtClean="0"/>
+              <a:t> </a:t>
+            </a:r>
+            <a:r>
+              <a:rPr lang="hu-HU" dirty="0" err="1" smtClean="0"/>
+              <a:t>to</a:t>
+            </a:r>
+            <a:r>
+              <a:rPr lang="hu-HU" dirty="0" smtClean="0"/>
+              <a:t> </a:t>
+            </a:r>
+            <a:r>
+              <a:rPr lang="hu-HU" dirty="0" err="1" smtClean="0"/>
+              <a:t>chunks</a:t>
+            </a:r>
+            <a:r>
+              <a:rPr lang="hu-HU" dirty="0" smtClean="0"/>
+              <a:t> and </a:t>
+            </a:r>
+            <a:r>
+              <a:rPr lang="hu-HU" dirty="0" err="1" smtClean="0"/>
+              <a:t>saved</a:t>
+            </a:r>
+            <a:r>
+              <a:rPr lang="hu-HU" dirty="0" smtClean="0"/>
+              <a:t> </a:t>
+            </a:r>
+            <a:r>
+              <a:rPr lang="hu-HU" dirty="0" err="1" smtClean="0"/>
+              <a:t>to</a:t>
+            </a:r>
+            <a:r>
+              <a:rPr lang="hu-HU" dirty="0" smtClean="0"/>
+              <a:t> a local </a:t>
+            </a:r>
+            <a:r>
+              <a:rPr lang="hu-HU" dirty="0" err="1" smtClean="0"/>
+              <a:t>Chroma</a:t>
+            </a:r>
+            <a:r>
+              <a:rPr lang="hu-HU" dirty="0" smtClean="0"/>
+              <a:t> </a:t>
+            </a:r>
+            <a:r>
+              <a:rPr lang="hu-HU" dirty="0" err="1" smtClean="0"/>
+              <a:t>Vector</a:t>
+            </a:r>
+            <a:r>
+              <a:rPr lang="hu-HU" dirty="0" smtClean="0"/>
+              <a:t> </a:t>
+            </a:r>
+            <a:r>
+              <a:rPr lang="hu-HU" dirty="0" err="1" smtClean="0"/>
+              <a:t>database</a:t>
+            </a:r>
+            <a:endParaRPr lang="hu-HU" dirty="0" smtClean="0"/>
+          </a:p>
+          <a:p>
+            <a:pPr lvl="1"/>
+            <a:r>
+              <a:rPr lang="hu-HU" dirty="0" err="1" smtClean="0"/>
+              <a:t>Embeddings</a:t>
+            </a:r>
+            <a:r>
+              <a:rPr lang="hu-HU" dirty="0" smtClean="0"/>
+              <a:t>: </a:t>
+            </a:r>
+            <a:r>
+              <a:rPr lang="hu-HU" dirty="0" err="1" smtClean="0"/>
+              <a:t>OpenAI</a:t>
+            </a:r>
+            <a:r>
+              <a:rPr lang="hu-HU" dirty="0" smtClean="0"/>
+              <a:t> text-embedding-3-small</a:t>
+            </a:r>
+          </a:p>
+          <a:p>
+            <a:pPr lvl="1"/>
+            <a:r>
+              <a:rPr lang="hu-HU" dirty="0" err="1" smtClean="0"/>
+              <a:t>Chunking</a:t>
+            </a:r>
+            <a:r>
+              <a:rPr lang="hu-HU" dirty="0" smtClean="0"/>
+              <a:t>: </a:t>
+            </a:r>
+            <a:r>
+              <a:rPr lang="hu-HU" dirty="0" err="1" smtClean="0"/>
+              <a:t>RecursiveCharacterTextSplitter</a:t>
+            </a:r>
+            <a:endParaRPr lang="hu-HU" dirty="0" smtClean="0"/>
+          </a:p>
+          <a:p>
+            <a:r>
+              <a:rPr lang="hu-HU" dirty="0" err="1" smtClean="0"/>
+              <a:t>Dynamic</a:t>
+            </a:r>
+            <a:r>
+              <a:rPr lang="hu-HU" dirty="0" smtClean="0"/>
+              <a:t> Data</a:t>
+            </a:r>
+          </a:p>
+          <a:p>
+            <a:pPr lvl="1"/>
+            <a:r>
+              <a:rPr lang="hu-HU" dirty="0" err="1" smtClean="0"/>
+              <a:t>SQLite</a:t>
+            </a:r>
+            <a:endParaRPr lang="hu-HU" dirty="0" smtClean="0"/>
+          </a:p>
+          <a:p>
+            <a:pPr lvl="1"/>
+            <a:endParaRPr lang="en-US" dirty="0"/>
+          </a:p>
+        </p:txBody>
+      </p:sp>
+    </p:spTree>
+    <p:extLst>
+      <p:ext uri="{BB962C8B-B14F-4D97-AF65-F5344CB8AC3E}">
+        <p14:creationId xmlns:p14="http://schemas.microsoft.com/office/powerpoint/2010/main" val="1166992713"/>
+      </p:ext>
+    </p:extLst>
+  </p:cSld>
+  <p:clrMapOvr>
+    <a:masterClrMapping/>
+  </p:clrMapOvr>
+</p:sld>
+</file>
+
+<file path=ppt/slides/slide3.xml><?xml version="1.0" encoding="utf-8"?>
+<p:sld xmlns:a="http://schemas.openxmlformats.org/drawingml/2006/main" xmlns:r="http://schemas.openxmlformats.org/officeDocument/2006/relationships" xmlns:p="http://schemas.openxmlformats.org/presentationml/2006/main">
+  <p:cSld>
+    <p:spTree>
+      <p:nvGrpSpPr>
+        <p:cNvPr id="1" name=""/>
+        <p:cNvGrpSpPr/>
+        <p:nvPr/>
+      </p:nvGrpSpPr>
+      <p:grpSpPr>
+        <a:xfrm>
+          <a:off x="0" y="0"/>
+          <a:ext cx="0" cy="0"/>
+          <a:chOff x="0" y="0"/>
+          <a:chExt cx="0" cy="0"/>
+        </a:xfrm>
+      </p:grpSpPr>
+      <p:sp>
+        <p:nvSpPr>
+          <p:cNvPr id="2" name="Cím 1"/>
+          <p:cNvSpPr>
+            <a:spLocks noGrp="1"/>
+          </p:cNvSpPr>
+          <p:nvPr>
+            <p:ph type="title"/>
+          </p:nvPr>
+        </p:nvSpPr>
+        <p:spPr>
+          <a:xfrm>
+            <a:off x="838200" y="365126"/>
+            <a:ext cx="10515600" cy="642408"/>
+          </a:xfrm>
+        </p:spPr>
+        <p:txBody>
+          <a:bodyPr>
+            <a:normAutofit fontScale="90000"/>
+          </a:bodyPr>
+          <a:lstStyle/>
+          <a:p>
+            <a:r>
+              <a:rPr lang="hu-HU" dirty="0" err="1" smtClean="0"/>
+              <a:t>Stage</a:t>
+            </a:r>
+            <a:r>
+              <a:rPr lang="hu-HU" dirty="0" smtClean="0"/>
+              <a:t> 1 – RAG and </a:t>
+            </a:r>
+            <a:r>
+              <a:rPr lang="hu-HU" dirty="0" err="1" smtClean="0"/>
+              <a:t>basic</a:t>
+            </a:r>
+            <a:r>
+              <a:rPr lang="hu-HU" dirty="0" smtClean="0"/>
+              <a:t> </a:t>
+            </a:r>
+            <a:r>
+              <a:rPr lang="hu-HU" dirty="0" err="1" smtClean="0"/>
+              <a:t>user</a:t>
+            </a:r>
+            <a:r>
+              <a:rPr lang="hu-HU" dirty="0" smtClean="0"/>
+              <a:t> chat</a:t>
+            </a:r>
+            <a:endParaRPr lang="en-US" dirty="0"/>
+          </a:p>
+        </p:txBody>
+      </p:sp>
+      <p:sp>
+        <p:nvSpPr>
+          <p:cNvPr id="3" name="Tartalom helye 2"/>
+          <p:cNvSpPr>
+            <a:spLocks noGrp="1"/>
+          </p:cNvSpPr>
+          <p:nvPr>
+            <p:ph idx="1"/>
+          </p:nvPr>
+        </p:nvSpPr>
+        <p:spPr/>
+        <p:txBody>
+          <a:bodyPr>
+            <a:normAutofit/>
+          </a:bodyPr>
+          <a:lstStyle/>
+          <a:p>
+            <a:r>
+              <a:rPr lang="hu-HU" dirty="0"/>
+              <a:t>UI</a:t>
+            </a:r>
+          </a:p>
+          <a:p>
+            <a:pPr lvl="1"/>
+            <a:r>
+              <a:rPr lang="hu-HU" dirty="0" err="1"/>
+              <a:t>Streamlit</a:t>
+            </a:r>
+            <a:endParaRPr lang="hu-HU" dirty="0"/>
+          </a:p>
+          <a:p>
+            <a:endParaRPr lang="hu-HU" dirty="0" smtClean="0"/>
+          </a:p>
+          <a:p>
+            <a:r>
+              <a:rPr lang="hu-HU" dirty="0" err="1" smtClean="0"/>
+              <a:t>Guardrails</a:t>
+            </a:r>
+            <a:endParaRPr lang="hu-HU" dirty="0" smtClean="0"/>
+          </a:p>
+          <a:p>
+            <a:pPr lvl="1"/>
+            <a:r>
+              <a:rPr lang="hu-HU" dirty="0" smtClean="0"/>
+              <a:t>System prompt </a:t>
+            </a:r>
+            <a:r>
+              <a:rPr lang="hu-HU" dirty="0" err="1" smtClean="0"/>
+              <a:t>prohibits</a:t>
+            </a:r>
+            <a:r>
+              <a:rPr lang="hu-HU" dirty="0" smtClean="0"/>
+              <a:t> </a:t>
+            </a:r>
+            <a:r>
+              <a:rPr lang="hu-HU" dirty="0" err="1" smtClean="0"/>
+              <a:t>task</a:t>
+            </a:r>
+            <a:r>
+              <a:rPr lang="hu-HU" dirty="0" smtClean="0"/>
+              <a:t>, </a:t>
+            </a:r>
+            <a:r>
+              <a:rPr lang="hu-HU" dirty="0" err="1" smtClean="0"/>
+              <a:t>which</a:t>
+            </a:r>
+            <a:r>
+              <a:rPr lang="hu-HU" dirty="0" smtClean="0"/>
+              <a:t> </a:t>
+            </a:r>
+            <a:r>
+              <a:rPr lang="hu-HU" dirty="0" err="1" smtClean="0"/>
+              <a:t>are</a:t>
+            </a:r>
+            <a:r>
+              <a:rPr lang="hu-HU" dirty="0" smtClean="0"/>
+              <a:t> </a:t>
+            </a:r>
+            <a:r>
+              <a:rPr lang="hu-HU" dirty="0" err="1" smtClean="0"/>
+              <a:t>not</a:t>
+            </a:r>
+            <a:r>
+              <a:rPr lang="hu-HU" dirty="0" smtClean="0"/>
+              <a:t> </a:t>
+            </a:r>
+            <a:r>
+              <a:rPr lang="hu-HU" dirty="0" err="1" smtClean="0"/>
+              <a:t>connected</a:t>
+            </a:r>
+            <a:r>
+              <a:rPr lang="hu-HU" dirty="0" smtClean="0"/>
+              <a:t> </a:t>
+            </a:r>
+            <a:r>
+              <a:rPr lang="hu-HU" dirty="0" err="1" smtClean="0"/>
+              <a:t>to</a:t>
+            </a:r>
+            <a:r>
+              <a:rPr lang="hu-HU" dirty="0" smtClean="0"/>
+              <a:t> </a:t>
+            </a:r>
+            <a:r>
+              <a:rPr lang="hu-HU" dirty="0" err="1" smtClean="0"/>
+              <a:t>the</a:t>
+            </a:r>
+            <a:r>
+              <a:rPr lang="hu-HU" dirty="0" smtClean="0"/>
+              <a:t> </a:t>
+            </a:r>
+            <a:r>
+              <a:rPr lang="hu-HU" dirty="0" err="1" smtClean="0"/>
+              <a:t>task</a:t>
+            </a:r>
+            <a:endParaRPr lang="hu-HU" dirty="0" smtClean="0"/>
+          </a:p>
+          <a:p>
+            <a:pPr lvl="1"/>
+            <a:r>
+              <a:rPr lang="hu-HU" dirty="0" smtClean="0"/>
+              <a:t>In </a:t>
+            </a:r>
+            <a:r>
+              <a:rPr lang="hu-HU" dirty="0" err="1" smtClean="0"/>
+              <a:t>addition</a:t>
+            </a:r>
+            <a:r>
+              <a:rPr lang="hu-HU" dirty="0" smtClean="0"/>
+              <a:t> </a:t>
+            </a:r>
+            <a:r>
+              <a:rPr lang="hu-HU" dirty="0" err="1" smtClean="0"/>
+              <a:t>to</a:t>
+            </a:r>
+            <a:r>
+              <a:rPr lang="hu-HU" dirty="0" smtClean="0"/>
+              <a:t> it, </a:t>
+            </a:r>
+            <a:r>
+              <a:rPr lang="hu-HU" dirty="0" err="1" smtClean="0"/>
+              <a:t>there</a:t>
+            </a:r>
+            <a:r>
+              <a:rPr lang="hu-HU" dirty="0" smtClean="0"/>
+              <a:t> </a:t>
+            </a:r>
+            <a:r>
+              <a:rPr lang="hu-HU" dirty="0" err="1" smtClean="0"/>
+              <a:t>are</a:t>
+            </a:r>
+            <a:r>
+              <a:rPr lang="hu-HU" dirty="0" smtClean="0"/>
+              <a:t> </a:t>
+            </a:r>
+            <a:r>
+              <a:rPr lang="hu-HU" dirty="0" err="1" smtClean="0"/>
+              <a:t>filters</a:t>
+            </a:r>
+            <a:r>
+              <a:rPr lang="hu-HU" dirty="0" smtClean="0"/>
+              <a:t> </a:t>
+            </a:r>
+            <a:r>
+              <a:rPr lang="hu-HU" dirty="0" err="1" smtClean="0"/>
+              <a:t>for</a:t>
+            </a:r>
+            <a:r>
+              <a:rPr lang="hu-HU" dirty="0" smtClean="0"/>
+              <a:t> </a:t>
+            </a:r>
+            <a:r>
+              <a:rPr lang="hu-HU" dirty="0" err="1" smtClean="0"/>
+              <a:t>certain</a:t>
+            </a:r>
+            <a:r>
+              <a:rPr lang="hu-HU" dirty="0" smtClean="0"/>
+              <a:t> </a:t>
+            </a:r>
+            <a:r>
+              <a:rPr lang="hu-HU" dirty="0" err="1" smtClean="0"/>
+              <a:t>words</a:t>
+            </a:r>
+            <a:r>
+              <a:rPr lang="hu-HU" dirty="0" smtClean="0"/>
+              <a:t>, </a:t>
+            </a:r>
+            <a:r>
+              <a:rPr lang="hu-HU" dirty="0" err="1" smtClean="0"/>
+              <a:t>which</a:t>
+            </a:r>
+            <a:r>
+              <a:rPr lang="hu-HU" dirty="0" smtClean="0"/>
+              <a:t> </a:t>
+            </a:r>
+            <a:r>
+              <a:rPr lang="hu-HU" dirty="0" err="1" smtClean="0"/>
+              <a:t>are</a:t>
+            </a:r>
+            <a:r>
+              <a:rPr lang="hu-HU" dirty="0" smtClean="0"/>
+              <a:t> </a:t>
+            </a:r>
+            <a:r>
+              <a:rPr lang="hu-HU" dirty="0" err="1" smtClean="0"/>
+              <a:t>prohibited</a:t>
+            </a:r>
+            <a:r>
+              <a:rPr lang="hu-HU" dirty="0" smtClean="0"/>
+              <a:t> (</a:t>
+            </a:r>
+            <a:r>
+              <a:rPr lang="hu-HU" dirty="0" err="1" smtClean="0"/>
+              <a:t>like</a:t>
+            </a:r>
+            <a:r>
+              <a:rPr lang="hu-HU" dirty="0" smtClean="0"/>
+              <a:t> </a:t>
+            </a:r>
+            <a:r>
+              <a:rPr lang="hu-HU" dirty="0" err="1" smtClean="0"/>
+              <a:t>system</a:t>
+            </a:r>
+            <a:r>
+              <a:rPr lang="hu-HU" dirty="0" smtClean="0"/>
+              <a:t>, </a:t>
+            </a:r>
+            <a:r>
+              <a:rPr lang="hu-HU" dirty="0" err="1" smtClean="0"/>
+              <a:t>promt</a:t>
+            </a:r>
+            <a:r>
+              <a:rPr lang="hu-HU" dirty="0" smtClean="0"/>
+              <a:t> </a:t>
+            </a:r>
+            <a:r>
+              <a:rPr lang="hu-HU" dirty="0" err="1" smtClean="0"/>
+              <a:t>etc</a:t>
+            </a:r>
+            <a:endParaRPr lang="hu-HU" dirty="0" smtClean="0"/>
+          </a:p>
+          <a:p>
+            <a:pPr lvl="1"/>
+            <a:endParaRPr lang="en-US" dirty="0"/>
+          </a:p>
+        </p:txBody>
+      </p:sp>
+    </p:spTree>
+    <p:extLst>
+      <p:ext uri="{BB962C8B-B14F-4D97-AF65-F5344CB8AC3E}">
+        <p14:creationId xmlns:p14="http://schemas.microsoft.com/office/powerpoint/2010/main" val="3403273005"/>
+      </p:ext>
+    </p:extLst>
+  </p:cSld>
+  <p:clrMapOvr>
+    <a:masterClrMapping/>
+  </p:clrMapOvr>
+</p:sld>
+</file>
+
+<file path=ppt/slides/slide4.xml><?xml version="1.0" encoding="utf-8"?>
+<p:sld xmlns:a="http://schemas.openxmlformats.org/drawingml/2006/main" xmlns:r="http://schemas.openxmlformats.org/officeDocument/2006/relationships" xmlns:p="http://schemas.openxmlformats.org/presentationml/2006/main">
+  <p:cSld>
+    <p:spTree>
+      <p:nvGrpSpPr>
+        <p:cNvPr id="1" name=""/>
+        <p:cNvGrpSpPr/>
+        <p:nvPr/>
+      </p:nvGrpSpPr>
+      <p:grpSpPr>
+        <a:xfrm>
+          <a:off x="0" y="0"/>
+          <a:ext cx="0" cy="0"/>
+          <a:chOff x="0" y="0"/>
+          <a:chExt cx="0" cy="0"/>
+        </a:xfrm>
+      </p:grpSpPr>
+      <p:sp>
+        <p:nvSpPr>
+          <p:cNvPr id="2" name="Cím 1"/>
+          <p:cNvSpPr>
+            <a:spLocks noGrp="1"/>
+          </p:cNvSpPr>
+          <p:nvPr>
+            <p:ph type="title"/>
+          </p:nvPr>
+        </p:nvSpPr>
+        <p:spPr>
+          <a:xfrm>
+            <a:off x="838200" y="365126"/>
+            <a:ext cx="10515600" cy="642408"/>
+          </a:xfrm>
+        </p:spPr>
+        <p:txBody>
+          <a:bodyPr>
+            <a:normAutofit fontScale="90000"/>
+          </a:bodyPr>
+          <a:lstStyle/>
+          <a:p>
+            <a:r>
+              <a:rPr lang="hu-HU" dirty="0" err="1" smtClean="0"/>
+              <a:t>Stage</a:t>
+            </a:r>
+            <a:r>
+              <a:rPr lang="hu-HU" dirty="0" smtClean="0"/>
+              <a:t> 1 – RAG and </a:t>
+            </a:r>
+            <a:r>
+              <a:rPr lang="hu-HU" dirty="0" err="1" smtClean="0"/>
+              <a:t>basic</a:t>
+            </a:r>
+            <a:r>
+              <a:rPr lang="hu-HU" dirty="0" smtClean="0"/>
+              <a:t> </a:t>
+            </a:r>
+            <a:r>
+              <a:rPr lang="hu-HU" dirty="0" err="1" smtClean="0"/>
+              <a:t>user</a:t>
+            </a:r>
+            <a:r>
+              <a:rPr lang="hu-HU" dirty="0" smtClean="0"/>
+              <a:t> chat</a:t>
+            </a:r>
+            <a:endParaRPr lang="en-US" dirty="0"/>
+          </a:p>
+        </p:txBody>
+      </p:sp>
+      <p:sp>
+        <p:nvSpPr>
+          <p:cNvPr id="3" name="Tartalom helye 2"/>
+          <p:cNvSpPr>
+            <a:spLocks noGrp="1"/>
+          </p:cNvSpPr>
+          <p:nvPr>
+            <p:ph idx="1"/>
+          </p:nvPr>
+        </p:nvSpPr>
+        <p:spPr/>
+        <p:txBody>
+          <a:bodyPr>
+            <a:normAutofit/>
+          </a:bodyPr>
+          <a:lstStyle/>
+          <a:p>
+            <a:r>
+              <a:rPr lang="hu-HU" dirty="0" smtClean="0"/>
+              <a:t>RAG</a:t>
+            </a:r>
+          </a:p>
+          <a:p>
+            <a:pPr lvl="1"/>
+            <a:r>
+              <a:rPr lang="hu-HU" dirty="0" err="1" smtClean="0"/>
+              <a:t>Static</a:t>
+            </a:r>
+            <a:r>
+              <a:rPr lang="hu-HU" dirty="0" smtClean="0"/>
+              <a:t> </a:t>
+            </a:r>
+            <a:r>
+              <a:rPr lang="hu-HU" dirty="0" err="1" smtClean="0"/>
+              <a:t>information</a:t>
+            </a:r>
+            <a:r>
+              <a:rPr lang="hu-HU" dirty="0" smtClean="0"/>
+              <a:t> (</a:t>
+            </a:r>
+            <a:r>
+              <a:rPr lang="hu-HU" dirty="0" err="1" smtClean="0"/>
+              <a:t>like</a:t>
+            </a:r>
+            <a:r>
+              <a:rPr lang="hu-HU" dirty="0" smtClean="0"/>
+              <a:t> </a:t>
+            </a:r>
+            <a:r>
+              <a:rPr lang="hu-HU" dirty="0" err="1" smtClean="0"/>
+              <a:t>location</a:t>
+            </a:r>
+            <a:r>
+              <a:rPr lang="hu-HU" dirty="0" smtClean="0"/>
+              <a:t>, </a:t>
+            </a:r>
+            <a:r>
+              <a:rPr lang="hu-HU" dirty="0" err="1" smtClean="0"/>
+              <a:t>etc</a:t>
+            </a:r>
+            <a:r>
+              <a:rPr lang="hu-HU" dirty="0" smtClean="0"/>
+              <a:t>) </a:t>
+            </a:r>
+            <a:r>
+              <a:rPr lang="hu-HU" dirty="0" err="1" smtClean="0"/>
+              <a:t>about</a:t>
+            </a:r>
+            <a:r>
+              <a:rPr lang="hu-HU" dirty="0" smtClean="0"/>
+              <a:t> </a:t>
+            </a:r>
+            <a:r>
+              <a:rPr lang="hu-HU" dirty="0" err="1" smtClean="0"/>
+              <a:t>the</a:t>
+            </a:r>
+            <a:r>
+              <a:rPr lang="hu-HU" dirty="0" smtClean="0"/>
+              <a:t> parking </a:t>
+            </a:r>
+            <a:r>
+              <a:rPr lang="hu-HU" dirty="0" err="1" smtClean="0"/>
+              <a:t>lot</a:t>
+            </a:r>
+            <a:r>
+              <a:rPr lang="hu-HU" dirty="0" smtClean="0"/>
+              <a:t> is in a </a:t>
+            </a:r>
+            <a:r>
+              <a:rPr lang="hu-HU" dirty="0" err="1" smtClean="0"/>
+              <a:t>long</a:t>
+            </a:r>
+            <a:r>
+              <a:rPr lang="hu-HU" dirty="0" smtClean="0"/>
+              <a:t> .md file</a:t>
+            </a:r>
+          </a:p>
+          <a:p>
+            <a:pPr lvl="1"/>
+            <a:r>
+              <a:rPr lang="hu-HU" dirty="0" smtClean="0"/>
+              <a:t>During </a:t>
+            </a:r>
+            <a:r>
+              <a:rPr lang="hu-HU" dirty="0" err="1" smtClean="0"/>
+              <a:t>init</a:t>
+            </a:r>
+            <a:r>
+              <a:rPr lang="hu-HU" dirty="0" smtClean="0"/>
+              <a:t> it is </a:t>
+            </a:r>
+            <a:r>
+              <a:rPr lang="hu-HU" dirty="0" err="1" smtClean="0"/>
+              <a:t>splitted</a:t>
+            </a:r>
+            <a:r>
+              <a:rPr lang="hu-HU" dirty="0" smtClean="0"/>
+              <a:t> </a:t>
+            </a:r>
+            <a:r>
+              <a:rPr lang="hu-HU" dirty="0" err="1" smtClean="0"/>
+              <a:t>to</a:t>
+            </a:r>
+            <a:r>
+              <a:rPr lang="hu-HU" dirty="0" smtClean="0"/>
+              <a:t> </a:t>
+            </a:r>
+            <a:r>
+              <a:rPr lang="hu-HU" dirty="0" err="1" smtClean="0"/>
+              <a:t>chunks</a:t>
+            </a:r>
+            <a:r>
+              <a:rPr lang="hu-HU" dirty="0" smtClean="0"/>
+              <a:t> and </a:t>
+            </a:r>
+            <a:r>
+              <a:rPr lang="hu-HU" dirty="0" err="1" smtClean="0"/>
+              <a:t>saved</a:t>
+            </a:r>
+            <a:r>
+              <a:rPr lang="hu-HU" dirty="0" smtClean="0"/>
+              <a:t> </a:t>
+            </a:r>
+            <a:r>
+              <a:rPr lang="hu-HU" dirty="0" err="1" smtClean="0"/>
+              <a:t>to</a:t>
+            </a:r>
+            <a:r>
+              <a:rPr lang="hu-HU" dirty="0" smtClean="0"/>
+              <a:t> a local </a:t>
+            </a:r>
+            <a:r>
+              <a:rPr lang="hu-HU" dirty="0" err="1" smtClean="0"/>
+              <a:t>Chroma</a:t>
+            </a:r>
+            <a:r>
+              <a:rPr lang="hu-HU" dirty="0" smtClean="0"/>
+              <a:t> </a:t>
+            </a:r>
+            <a:r>
+              <a:rPr lang="hu-HU" dirty="0" err="1" smtClean="0"/>
+              <a:t>Vector</a:t>
+            </a:r>
+            <a:r>
+              <a:rPr lang="hu-HU" dirty="0" smtClean="0"/>
+              <a:t> </a:t>
+            </a:r>
+            <a:r>
+              <a:rPr lang="hu-HU" dirty="0" err="1" smtClean="0"/>
+              <a:t>database</a:t>
+            </a:r>
+            <a:endParaRPr lang="hu-HU" dirty="0" smtClean="0"/>
+          </a:p>
+          <a:p>
+            <a:pPr lvl="1"/>
+            <a:r>
+              <a:rPr lang="hu-HU" dirty="0" err="1" smtClean="0"/>
+              <a:t>Embeddings</a:t>
+            </a:r>
+            <a:r>
+              <a:rPr lang="hu-HU" dirty="0" smtClean="0"/>
+              <a:t>: </a:t>
+            </a:r>
+            <a:r>
+              <a:rPr lang="hu-HU" dirty="0" err="1" smtClean="0"/>
+              <a:t>OpenAI</a:t>
+            </a:r>
+            <a:r>
+              <a:rPr lang="hu-HU" dirty="0" smtClean="0"/>
+              <a:t> text-embedding-3-small</a:t>
+            </a:r>
+          </a:p>
+          <a:p>
+            <a:pPr lvl="1"/>
+            <a:r>
+              <a:rPr lang="hu-HU" dirty="0" err="1" smtClean="0"/>
+              <a:t>Chunking</a:t>
+            </a:r>
+            <a:r>
+              <a:rPr lang="hu-HU" dirty="0" smtClean="0"/>
+              <a:t>: </a:t>
+            </a:r>
+            <a:r>
+              <a:rPr lang="hu-HU" dirty="0" err="1" smtClean="0"/>
+              <a:t>RecursiveCharacterTextSplitter</a:t>
+            </a:r>
+            <a:endParaRPr lang="hu-HU" dirty="0" smtClean="0"/>
+          </a:p>
+          <a:p>
+            <a:r>
+              <a:rPr lang="hu-HU" dirty="0" err="1" smtClean="0"/>
+              <a:t>Dynamic</a:t>
+            </a:r>
+            <a:r>
+              <a:rPr lang="hu-HU" dirty="0" smtClean="0"/>
+              <a:t> Data</a:t>
+            </a:r>
+          </a:p>
+          <a:p>
+            <a:pPr lvl="1"/>
+            <a:r>
+              <a:rPr lang="hu-HU" dirty="0" err="1" smtClean="0"/>
+              <a:t>SQLite</a:t>
+            </a:r>
+            <a:endParaRPr lang="hu-HU" dirty="0" smtClean="0"/>
+          </a:p>
+          <a:p>
+            <a:r>
+              <a:rPr lang="hu-HU" dirty="0" smtClean="0"/>
+              <a:t>UI</a:t>
+            </a:r>
+          </a:p>
+          <a:p>
+            <a:pPr lvl="1"/>
+            <a:r>
+              <a:rPr lang="hu-HU" dirty="0" err="1" smtClean="0"/>
+              <a:t>Streamlit</a:t>
+            </a:r>
+            <a:endParaRPr lang="hu-HU" dirty="0" smtClean="0"/>
+          </a:p>
+          <a:p>
+            <a:pPr lvl="1"/>
+            <a:endParaRPr lang="en-US" dirty="0"/>
+          </a:p>
+        </p:txBody>
+      </p:sp>
+    </p:spTree>
+    <p:extLst>
+      <p:ext uri="{BB962C8B-B14F-4D97-AF65-F5344CB8AC3E}">
+        <p14:creationId xmlns:p14="http://schemas.microsoft.com/office/powerpoint/2010/main" val="1627569160"/>
+      </p:ext>
+    </p:extLst>
+  </p:cSld>
+  <p:clrMapOvr>
+    <a:masterClrMapping/>
+  </p:clrMapOvr>
+</p:sld>
+</file>
+
+<file path=ppt/slides/slide5.xml><?xml version="1.0" encoding="utf-8"?>
+<p:sld xmlns:a="http://schemas.openxmlformats.org/drawingml/2006/main" xmlns:r="http://schemas.openxmlformats.org/officeDocument/2006/relationships" xmlns:p="http://schemas.openxmlformats.org/presentationml/2006/main">
+  <p:cSld>
+    <p:spTree>
+      <p:nvGrpSpPr>
+        <p:cNvPr id="1" name=""/>
+        <p:cNvGrpSpPr/>
+        <p:nvPr/>
+      </p:nvGrpSpPr>
+      <p:grpSpPr>
+        <a:xfrm>
+          <a:off x="0" y="0"/>
+          <a:ext cx="0" cy="0"/>
+          <a:chOff x="0" y="0"/>
+          <a:chExt cx="0" cy="0"/>
+        </a:xfrm>
+      </p:grpSpPr>
+      <p:sp>
+        <p:nvSpPr>
+          <p:cNvPr id="2" name="Cím 1"/>
+          <p:cNvSpPr>
+            <a:spLocks noGrp="1"/>
+          </p:cNvSpPr>
+          <p:nvPr>
+            <p:ph type="title"/>
+          </p:nvPr>
+        </p:nvSpPr>
+        <p:spPr>
+          <a:xfrm>
+            <a:off x="838200" y="365126"/>
+            <a:ext cx="10515600" cy="642408"/>
+          </a:xfrm>
+        </p:spPr>
+        <p:txBody>
+          <a:bodyPr>
+            <a:normAutofit fontScale="90000"/>
+          </a:bodyPr>
+          <a:lstStyle/>
+          <a:p>
+            <a:r>
+              <a:rPr lang="hu-HU" dirty="0" err="1" smtClean="0"/>
+              <a:t>Stage</a:t>
+            </a:r>
+            <a:r>
+              <a:rPr lang="hu-HU" dirty="0" smtClean="0"/>
+              <a:t> </a:t>
+            </a:r>
+            <a:r>
+              <a:rPr lang="hu-HU" dirty="0" smtClean="0"/>
+              <a:t>1 </a:t>
+            </a:r>
+            <a:r>
+              <a:rPr lang="hu-HU" dirty="0" smtClean="0"/>
+              <a:t>– </a:t>
+            </a:r>
+            <a:r>
+              <a:rPr lang="hu-HU" dirty="0" smtClean="0"/>
+              <a:t>RAG </a:t>
+            </a:r>
+            <a:r>
+              <a:rPr lang="hu-HU" dirty="0" err="1" smtClean="0"/>
+              <a:t>evaluation</a:t>
+            </a:r>
+            <a:endParaRPr lang="en-US" dirty="0"/>
+          </a:p>
+        </p:txBody>
+      </p:sp>
+      <p:pic>
+        <p:nvPicPr>
+          <p:cNvPr id="4" name="Tartalom helye 3"/>
+          <p:cNvPicPr>
+            <a:picLocks noGrp="1" noChangeAspect="1"/>
+          </p:cNvPicPr>
+          <p:nvPr>
+            <p:ph idx="1"/>
+          </p:nvPr>
+        </p:nvPicPr>
+        <p:blipFill>
+          <a:blip r:embed="rId2">
+            <a:extLst>
+              <a:ext uri="{28A0092B-C50C-407E-A947-70E740481C1C}">
+                <a14:useLocalDpi xmlns:a14="http://schemas.microsoft.com/office/drawing/2010/main" val="0"/>
+              </a:ext>
+            </a:extLst>
+          </a:blip>
+          <a:stretch>
+            <a:fillRect/>
+          </a:stretch>
+        </p:blipFill>
+        <p:spPr>
+          <a:xfrm>
+            <a:off x="1371357" y="2394661"/>
+            <a:ext cx="9449286" cy="3213265"/>
+          </a:xfrm>
+        </p:spPr>
+      </p:pic>
+    </p:spTree>
+    <p:extLst>
+      <p:ext uri="{BB962C8B-B14F-4D97-AF65-F5344CB8AC3E}">
+        <p14:creationId xmlns:p14="http://schemas.microsoft.com/office/powerpoint/2010/main" val="3292029770"/>
+      </p:ext>
+    </p:extLst>
+  </p:cSld>
+  <p:clrMapOvr>
+    <a:masterClrMapping/>
+  </p:clrMapOvr>
+</p:sld>
+</file>
+
+<file path=ppt/slides/slide6.xml><?xml version="1.0" encoding="utf-8"?>
+<p:sld xmlns:a="http://schemas.openxmlformats.org/drawingml/2006/main" xmlns:r="http://schemas.openxmlformats.org/officeDocument/2006/relationships" xmlns:p="http://schemas.openxmlformats.org/presentationml/2006/main">
+  <p:cSld>
+    <p:spTree>
+      <p:nvGrpSpPr>
+        <p:cNvPr id="1" name=""/>
+        <p:cNvGrpSpPr/>
+        <p:nvPr/>
+      </p:nvGrpSpPr>
+      <p:grpSpPr>
+        <a:xfrm>
+          <a:off x="0" y="0"/>
+          <a:ext cx="0" cy="0"/>
+          <a:chOff x="0" y="0"/>
+          <a:chExt cx="0" cy="0"/>
+        </a:xfrm>
+      </p:grpSpPr>
+      <p:sp>
+        <p:nvSpPr>
+          <p:cNvPr id="2" name="Cím 1"/>
+          <p:cNvSpPr>
+            <a:spLocks noGrp="1"/>
+          </p:cNvSpPr>
+          <p:nvPr>
+            <p:ph type="title"/>
+          </p:nvPr>
+        </p:nvSpPr>
+        <p:spPr>
+          <a:xfrm>
+            <a:off x="838200" y="365126"/>
+            <a:ext cx="10515600" cy="642408"/>
+          </a:xfrm>
+        </p:spPr>
+        <p:txBody>
+          <a:bodyPr>
+            <a:normAutofit fontScale="90000"/>
+          </a:bodyPr>
+          <a:lstStyle/>
+          <a:p>
+            <a:r>
+              <a:rPr lang="hu-HU" dirty="0" err="1" smtClean="0"/>
+              <a:t>All</a:t>
+            </a:r>
+            <a:r>
+              <a:rPr lang="hu-HU" dirty="0" smtClean="0"/>
+              <a:t> </a:t>
+            </a:r>
+            <a:r>
+              <a:rPr lang="hu-HU" dirty="0" err="1" smtClean="0"/>
+              <a:t>stages</a:t>
+            </a:r>
+            <a:r>
+              <a:rPr lang="hu-HU" dirty="0" smtClean="0"/>
+              <a:t> – </a:t>
+            </a:r>
+            <a:r>
+              <a:rPr lang="hu-HU" dirty="0" err="1" smtClean="0"/>
+              <a:t>Tests</a:t>
+            </a:r>
+            <a:endParaRPr lang="en-US" dirty="0"/>
+          </a:p>
+        </p:txBody>
+      </p:sp>
+      <p:pic>
+        <p:nvPicPr>
+          <p:cNvPr id="5" name="Tartalom helye 4"/>
+          <p:cNvPicPr>
+            <a:picLocks noGrp="1" noChangeAspect="1"/>
+          </p:cNvPicPr>
+          <p:nvPr>
+            <p:ph idx="1"/>
+          </p:nvPr>
+        </p:nvPicPr>
+        <p:blipFill>
+          <a:blip r:embed="rId2">
+            <a:extLst>
+              <a:ext uri="{28A0092B-C50C-407E-A947-70E740481C1C}">
+                <a14:useLocalDpi xmlns:a14="http://schemas.microsoft.com/office/drawing/2010/main" val="0"/>
+              </a:ext>
+            </a:extLst>
+          </a:blip>
+          <a:stretch>
+            <a:fillRect/>
+          </a:stretch>
+        </p:blipFill>
+        <p:spPr>
+          <a:xfrm>
+            <a:off x="838200" y="2756742"/>
+            <a:ext cx="10515600" cy="2489104"/>
+          </a:xfrm>
+        </p:spPr>
+      </p:pic>
+    </p:spTree>
+    <p:extLst>
+      <p:ext uri="{BB962C8B-B14F-4D97-AF65-F5344CB8AC3E}">
+        <p14:creationId xmlns:p14="http://schemas.microsoft.com/office/powerpoint/2010/main" val="2465877281"/>
+      </p:ext>
+    </p:extLst>
+  </p:cSld>
+  <p:clrMapOvr>
+    <a:masterClrMapping/>
+  </p:clrMapOvr>
+</p:sld>
+</file>
+
+<file path=ppt/slides/slide7.xml><?xml version="1.0" encoding="utf-8"?>
+<p:sld xmlns:a="http://schemas.openxmlformats.org/drawingml/2006/main" xmlns:r="http://schemas.openxmlformats.org/officeDocument/2006/relationships" xmlns:p="http://schemas.openxmlformats.org/presentationml/2006/main">
+  <p:cSld>
+    <p:spTree>
+      <p:nvGrpSpPr>
+        <p:cNvPr id="1" name=""/>
+        <p:cNvGrpSpPr/>
+        <p:nvPr/>
+      </p:nvGrpSpPr>
+      <p:grpSpPr>
+        <a:xfrm>
+          <a:off x="0" y="0"/>
+          <a:ext cx="0" cy="0"/>
+          <a:chOff x="0" y="0"/>
+          <a:chExt cx="0" cy="0"/>
+        </a:xfrm>
+      </p:grpSpPr>
+      <p:sp>
+        <p:nvSpPr>
+          <p:cNvPr id="2" name="Cím 1"/>
+          <p:cNvSpPr>
+            <a:spLocks noGrp="1"/>
+          </p:cNvSpPr>
+          <p:nvPr>
+            <p:ph type="title"/>
+          </p:nvPr>
+        </p:nvSpPr>
+        <p:spPr>
+          <a:xfrm>
+            <a:off x="838200" y="365126"/>
+            <a:ext cx="10515600" cy="642408"/>
+          </a:xfrm>
+        </p:spPr>
+        <p:txBody>
+          <a:bodyPr>
+            <a:normAutofit fontScale="90000"/>
+          </a:bodyPr>
+          <a:lstStyle/>
+          <a:p>
+            <a:r>
+              <a:rPr lang="hu-HU" dirty="0" err="1" smtClean="0"/>
+              <a:t>Stage</a:t>
+            </a:r>
+            <a:r>
+              <a:rPr lang="hu-HU" dirty="0" smtClean="0"/>
+              <a:t> </a:t>
+            </a:r>
+            <a:r>
+              <a:rPr lang="hu-HU" dirty="0" smtClean="0"/>
+              <a:t>1 </a:t>
+            </a:r>
+            <a:r>
+              <a:rPr lang="hu-HU" dirty="0" smtClean="0"/>
+              <a:t>– </a:t>
+            </a:r>
+            <a:r>
+              <a:rPr lang="hu-HU" dirty="0" err="1" smtClean="0"/>
+              <a:t>User</a:t>
+            </a:r>
+            <a:r>
+              <a:rPr lang="hu-HU" dirty="0" smtClean="0"/>
+              <a:t> input </a:t>
+            </a:r>
+            <a:r>
+              <a:rPr lang="hu-HU" dirty="0" err="1" smtClean="0"/>
+              <a:t>handling</a:t>
+            </a:r>
+            <a:endParaRPr lang="en-US" dirty="0"/>
+          </a:p>
+        </p:txBody>
+      </p:sp>
+      <p:pic>
+        <p:nvPicPr>
+          <p:cNvPr id="4" name="Tartalom helye 3"/>
+          <p:cNvPicPr>
+            <a:picLocks noGrp="1" noChangeAspect="1"/>
+          </p:cNvPicPr>
+          <p:nvPr>
+            <p:ph idx="1"/>
+          </p:nvPr>
+        </p:nvPicPr>
+        <p:blipFill>
+          <a:blip r:embed="rId2" cstate="print">
+            <a:extLst>
+              <a:ext uri="{28A0092B-C50C-407E-A947-70E740481C1C}">
+                <a14:useLocalDpi xmlns:a14="http://schemas.microsoft.com/office/drawing/2010/main" val="0"/>
+              </a:ext>
+            </a:extLst>
+          </a:blip>
+          <a:stretch>
+            <a:fillRect/>
+          </a:stretch>
+        </p:blipFill>
+        <p:spPr>
+          <a:xfrm>
+            <a:off x="984240" y="1242301"/>
+            <a:ext cx="4171084" cy="5198066"/>
+          </a:xfrm>
+        </p:spPr>
+      </p:pic>
+      <p:pic>
+        <p:nvPicPr>
+          <p:cNvPr id="5" name="Kép 4"/>
+          <p:cNvPicPr>
+            <a:picLocks noChangeAspect="1"/>
+          </p:cNvPicPr>
+          <p:nvPr/>
+        </p:nvPicPr>
+        <p:blipFill>
+          <a:blip r:embed="rId3">
+            <a:extLst>
+              <a:ext uri="{28A0092B-C50C-407E-A947-70E740481C1C}">
+                <a14:useLocalDpi xmlns:a14="http://schemas.microsoft.com/office/drawing/2010/main" val="0"/>
+              </a:ext>
+            </a:extLst>
+          </a:blip>
+          <a:stretch>
+            <a:fillRect/>
+          </a:stretch>
+        </p:blipFill>
+        <p:spPr>
+          <a:xfrm>
+            <a:off x="6252353" y="1206215"/>
+            <a:ext cx="4757940" cy="5234152"/>
+          </a:xfrm>
+          <a:prstGeom prst="rect">
+            <a:avLst/>
+          </a:prstGeom>
+        </p:spPr>
+      </p:pic>
+    </p:spTree>
+    <p:extLst>
+      <p:ext uri="{BB962C8B-B14F-4D97-AF65-F5344CB8AC3E}">
+        <p14:creationId xmlns:p14="http://schemas.microsoft.com/office/powerpoint/2010/main" val="3429869406"/>
+      </p:ext>
+    </p:extLst>
+  </p:cSld>
+  <p:clrMapOvr>
+    <a:masterClrMapping/>
+  </p:clrMapOvr>
+</p:sld>
+</file>
+
+<file path=ppt/slides/slide8.xml><?xml version="1.0" encoding="utf-8"?>
+<p:sld xmlns:a="http://schemas.openxmlformats.org/drawingml/2006/main" xmlns:r="http://schemas.openxmlformats.org/officeDocument/2006/relationships" xmlns:p="http://schemas.openxmlformats.org/presentationml/2006/main">
+  <p:cSld>
+    <p:spTree>
+      <p:nvGrpSpPr>
+        <p:cNvPr id="1" name=""/>
+        <p:cNvGrpSpPr/>
+        <p:nvPr/>
+      </p:nvGrpSpPr>
+      <p:grpSpPr>
+        <a:xfrm>
+          <a:off x="0" y="0"/>
+          <a:ext cx="0" cy="0"/>
+          <a:chOff x="0" y="0"/>
+          <a:chExt cx="0" cy="0"/>
+        </a:xfrm>
+      </p:grpSpPr>
+      <p:sp>
+        <p:nvSpPr>
+          <p:cNvPr id="2" name="Cím 1"/>
+          <p:cNvSpPr>
+            <a:spLocks noGrp="1"/>
+          </p:cNvSpPr>
+          <p:nvPr>
+            <p:ph type="title"/>
+          </p:nvPr>
+        </p:nvSpPr>
+        <p:spPr>
+          <a:xfrm>
+            <a:off x="838200" y="365126"/>
+            <a:ext cx="10515600" cy="642408"/>
+          </a:xfrm>
+        </p:spPr>
+        <p:txBody>
+          <a:bodyPr>
+            <a:normAutofit fontScale="90000"/>
+          </a:bodyPr>
+          <a:lstStyle/>
+          <a:p>
+            <a:pPr algn="ctr"/>
+            <a:r>
+              <a:rPr lang="hu-HU" dirty="0" err="1" smtClean="0"/>
+              <a:t>Stage</a:t>
+            </a:r>
+            <a:r>
+              <a:rPr lang="hu-HU" dirty="0" smtClean="0"/>
+              <a:t> </a:t>
+            </a:r>
+            <a:r>
+              <a:rPr lang="hu-HU" dirty="0" smtClean="0"/>
+              <a:t>2</a:t>
+            </a:r>
+            <a:endParaRPr lang="en-US" dirty="0"/>
+          </a:p>
+        </p:txBody>
+      </p:sp>
+      <p:sp>
+        <p:nvSpPr>
+          <p:cNvPr id="3" name="Tartalom helye 2"/>
+          <p:cNvSpPr>
+            <a:spLocks noGrp="1"/>
+          </p:cNvSpPr>
+          <p:nvPr>
+            <p:ph idx="1"/>
+          </p:nvPr>
+        </p:nvSpPr>
+        <p:spPr/>
+        <p:txBody>
+          <a:bodyPr/>
+          <a:lstStyle/>
+          <a:p>
+            <a:r>
+              <a:rPr lang="hu-HU" dirty="0" err="1" smtClean="0"/>
+              <a:t>At</a:t>
+            </a:r>
+            <a:r>
+              <a:rPr lang="hu-HU" dirty="0" smtClean="0"/>
+              <a:t> </a:t>
+            </a:r>
+            <a:r>
+              <a:rPr lang="hu-HU" dirty="0" err="1" smtClean="0"/>
+              <a:t>stage</a:t>
+            </a:r>
+            <a:r>
+              <a:rPr lang="hu-HU" dirty="0" smtClean="0"/>
+              <a:t> 2, </a:t>
+            </a:r>
+            <a:r>
+              <a:rPr lang="hu-HU" dirty="0" err="1" smtClean="0"/>
+              <a:t>admin</a:t>
+            </a:r>
+            <a:r>
+              <a:rPr lang="hu-HU" dirty="0" smtClean="0"/>
+              <a:t> </a:t>
+            </a:r>
+            <a:r>
+              <a:rPr lang="hu-HU" dirty="0" err="1" smtClean="0"/>
+              <a:t>tasks</a:t>
+            </a:r>
+            <a:r>
+              <a:rPr lang="hu-HU" dirty="0" smtClean="0"/>
+              <a:t> </a:t>
+            </a:r>
+            <a:r>
+              <a:rPr lang="hu-HU" dirty="0" err="1" smtClean="0"/>
+              <a:t>are</a:t>
+            </a:r>
+            <a:r>
+              <a:rPr lang="hu-HU" dirty="0" smtClean="0"/>
+              <a:t> </a:t>
+            </a:r>
+            <a:r>
+              <a:rPr lang="hu-HU" dirty="0" err="1" smtClean="0"/>
+              <a:t>added</a:t>
+            </a:r>
+            <a:r>
+              <a:rPr lang="hu-HU" dirty="0" smtClean="0"/>
+              <a:t>.</a:t>
+            </a:r>
+          </a:p>
+          <a:p>
+            <a:r>
+              <a:rPr lang="hu-HU" dirty="0" smtClean="0"/>
+              <a:t>Email </a:t>
+            </a:r>
+            <a:r>
+              <a:rPr lang="hu-HU" dirty="0" err="1" smtClean="0"/>
+              <a:t>notification</a:t>
+            </a:r>
+            <a:r>
+              <a:rPr lang="hu-HU" dirty="0" smtClean="0"/>
+              <a:t> </a:t>
+            </a:r>
+            <a:r>
+              <a:rPr lang="hu-HU" dirty="0" err="1" smtClean="0"/>
+              <a:t>to</a:t>
+            </a:r>
+            <a:r>
+              <a:rPr lang="hu-HU" dirty="0" smtClean="0"/>
+              <a:t> </a:t>
+            </a:r>
+            <a:r>
+              <a:rPr lang="hu-HU" dirty="0" err="1" smtClean="0"/>
+              <a:t>the</a:t>
+            </a:r>
+            <a:r>
+              <a:rPr lang="hu-HU" dirty="0" smtClean="0"/>
+              <a:t> </a:t>
+            </a:r>
+            <a:r>
+              <a:rPr lang="hu-HU" dirty="0" err="1" smtClean="0"/>
+              <a:t>admin</a:t>
+            </a:r>
+            <a:endParaRPr lang="hu-HU" dirty="0" smtClean="0"/>
+          </a:p>
+          <a:p>
+            <a:r>
+              <a:rPr lang="hu-HU" dirty="0" err="1" smtClean="0"/>
+              <a:t>Opportonity</a:t>
+            </a:r>
+            <a:r>
+              <a:rPr lang="hu-HU" dirty="0" smtClean="0"/>
+              <a:t> </a:t>
+            </a:r>
+            <a:r>
+              <a:rPr lang="hu-HU" dirty="0" err="1" smtClean="0"/>
+              <a:t>to</a:t>
+            </a:r>
+            <a:r>
+              <a:rPr lang="hu-HU" dirty="0" smtClean="0"/>
+              <a:t> </a:t>
+            </a:r>
+            <a:r>
+              <a:rPr lang="hu-HU" dirty="0" err="1" smtClean="0"/>
+              <a:t>approve</a:t>
+            </a:r>
+            <a:r>
+              <a:rPr lang="hu-HU" dirty="0" smtClean="0"/>
+              <a:t> </a:t>
+            </a:r>
+            <a:r>
+              <a:rPr lang="hu-HU" dirty="0" err="1" smtClean="0"/>
+              <a:t>or</a:t>
+            </a:r>
+            <a:r>
+              <a:rPr lang="hu-HU" dirty="0" smtClean="0"/>
+              <a:t> </a:t>
+            </a:r>
+            <a:r>
+              <a:rPr lang="hu-HU" dirty="0" err="1" smtClean="0"/>
+              <a:t>reject</a:t>
+            </a:r>
+            <a:r>
+              <a:rPr lang="hu-HU" dirty="0" smtClean="0"/>
+              <a:t> a </a:t>
+            </a:r>
+            <a:r>
+              <a:rPr lang="hu-HU" dirty="0" err="1" smtClean="0"/>
+              <a:t>reservation</a:t>
+            </a:r>
+            <a:endParaRPr lang="en-US" dirty="0"/>
+          </a:p>
+        </p:txBody>
+      </p:sp>
+    </p:spTree>
+    <p:extLst>
+      <p:ext uri="{BB962C8B-B14F-4D97-AF65-F5344CB8AC3E}">
+        <p14:creationId xmlns:p14="http://schemas.microsoft.com/office/powerpoint/2010/main" val="1004374098"/>
+      </p:ext>
+    </p:extLst>
+  </p:cSld>
+  <p:clrMapOvr>
+    <a:masterClrMapping/>
+  </p:clrMapOvr>
+</p:sld>
+</file>
+
+<file path=ppt/slides/slide9.xml><?xml version="1.0" encoding="utf-8"?>
+<p:sld xmlns:a="http://schemas.openxmlformats.org/drawingml/2006/main" xmlns:r="http://schemas.openxmlformats.org/officeDocument/2006/relationships" xmlns:p="http://schemas.openxmlformats.org/presentationml/2006/main">
+  <p:cSld>
+    <p:spTree>
+      <p:nvGrpSpPr>
+        <p:cNvPr id="1" name=""/>
+        <p:cNvGrpSpPr/>
+        <p:nvPr/>
+      </p:nvGrpSpPr>
+      <p:grpSpPr>
+        <a:xfrm>
+          <a:off x="0" y="0"/>
+          <a:ext cx="0" cy="0"/>
+          <a:chOff x="0" y="0"/>
+          <a:chExt cx="0" cy="0"/>
+        </a:xfrm>
+      </p:grpSpPr>
+      <p:sp>
+        <p:nvSpPr>
+          <p:cNvPr id="2" name="Cím 1"/>
+          <p:cNvSpPr>
+            <a:spLocks noGrp="1"/>
+          </p:cNvSpPr>
+          <p:nvPr>
+            <p:ph type="title"/>
+          </p:nvPr>
+        </p:nvSpPr>
+        <p:spPr>
+          <a:xfrm>
+            <a:off x="838200" y="365126"/>
+            <a:ext cx="10515600" cy="642408"/>
+          </a:xfrm>
+        </p:spPr>
+        <p:txBody>
+          <a:bodyPr>
+            <a:normAutofit fontScale="90000"/>
+          </a:bodyPr>
+          <a:lstStyle/>
+          <a:p>
+            <a:r>
+              <a:rPr lang="hu-HU" dirty="0" err="1" smtClean="0"/>
+              <a:t>Stage</a:t>
+            </a:r>
+            <a:r>
+              <a:rPr lang="hu-HU" dirty="0" smtClean="0"/>
+              <a:t> 2 – </a:t>
+            </a:r>
+            <a:r>
+              <a:rPr lang="hu-HU" dirty="0" err="1" smtClean="0"/>
+              <a:t>Sending</a:t>
+            </a:r>
+            <a:r>
+              <a:rPr lang="hu-HU" dirty="0" smtClean="0"/>
+              <a:t> </a:t>
+            </a:r>
+            <a:r>
+              <a:rPr lang="hu-HU" dirty="0" err="1" smtClean="0"/>
+              <a:t>notification</a:t>
+            </a:r>
+            <a:r>
+              <a:rPr lang="hu-HU" dirty="0" smtClean="0"/>
+              <a:t> email </a:t>
+            </a:r>
+            <a:r>
+              <a:rPr lang="hu-HU" dirty="0" err="1" smtClean="0"/>
+              <a:t>for</a:t>
+            </a:r>
+            <a:r>
+              <a:rPr lang="hu-HU" dirty="0" smtClean="0"/>
+              <a:t> human</a:t>
+            </a:r>
+            <a:endParaRPr lang="en-US" dirty="0"/>
+          </a:p>
+        </p:txBody>
+      </p:sp>
+      <p:pic>
+        <p:nvPicPr>
+          <p:cNvPr id="5" name="Tartalom helye 4"/>
+          <p:cNvPicPr>
+            <a:picLocks noGrp="1" noChangeAspect="1"/>
+          </p:cNvPicPr>
+          <p:nvPr>
+            <p:ph idx="1"/>
+          </p:nvPr>
+        </p:nvPicPr>
+        <p:blipFill>
+          <a:blip r:embed="rId2">
+            <a:extLst>
+              <a:ext uri="{28A0092B-C50C-407E-A947-70E740481C1C}">
+                <a14:useLocalDpi xmlns:a14="http://schemas.microsoft.com/office/drawing/2010/main" val="0"/>
+              </a:ext>
+            </a:extLst>
+          </a:blip>
+          <a:stretch>
+            <a:fillRect/>
+          </a:stretch>
+        </p:blipFill>
+        <p:spPr>
+          <a:xfrm>
+            <a:off x="1174770" y="1825625"/>
+            <a:ext cx="9842460" cy="4351338"/>
+          </a:xfrm>
+        </p:spPr>
+      </p:pic>
+    </p:spTree>
+    <p:extLst>
+      <p:ext uri="{BB962C8B-B14F-4D97-AF65-F5344CB8AC3E}">
+        <p14:creationId xmlns:p14="http://schemas.microsoft.com/office/powerpoint/2010/main" val="2928641094"/>
       </p:ext>
     </p:extLst>
   </p:cSld>

--- a/artifacts/DeckChatbot.pptx
+++ b/artifacts/DeckChatbot.pptx
@@ -3209,11 +3209,7 @@
             </a:r>
             <a:r>
               <a:rPr lang="hu-HU" dirty="0" smtClean="0"/>
-              <a:t> </a:t>
-            </a:r>
-            <a:r>
-              <a:rPr lang="hu-HU" dirty="0" smtClean="0"/>
-              <a:t>3</a:t>
+              <a:t> 3</a:t>
             </a:r>
             <a:endParaRPr lang="en-US" dirty="0"/>
           </a:p>
@@ -3286,7 +3282,53 @@
             </a:r>
             <a:r>
               <a:rPr lang="hu-HU" dirty="0" smtClean="0"/>
-              <a:t> a text file</a:t>
+              <a:t> a text </a:t>
+            </a:r>
+            <a:r>
+              <a:rPr lang="hu-HU" dirty="0" smtClean="0"/>
+              <a:t>file</a:t>
+            </a:r>
+          </a:p>
+          <a:p>
+            <a:r>
+              <a:rPr lang="hu-HU" dirty="0" smtClean="0"/>
+              <a:t>The </a:t>
+            </a:r>
+            <a:r>
+              <a:rPr lang="hu-HU" dirty="0" err="1" smtClean="0"/>
+              <a:t>security</a:t>
+            </a:r>
+            <a:r>
+              <a:rPr lang="hu-HU" dirty="0" smtClean="0"/>
+              <a:t> of </a:t>
+            </a:r>
+            <a:r>
+              <a:rPr lang="hu-HU" dirty="0" err="1" smtClean="0"/>
+              <a:t>the</a:t>
+            </a:r>
+            <a:r>
+              <a:rPr lang="hu-HU" dirty="0" smtClean="0"/>
+              <a:t> MCP server is </a:t>
+            </a:r>
+            <a:r>
+              <a:rPr lang="hu-HU" dirty="0" err="1" smtClean="0"/>
+              <a:t>handled</a:t>
+            </a:r>
+            <a:r>
+              <a:rPr lang="hu-HU" dirty="0" smtClean="0"/>
+              <a:t> </a:t>
+            </a:r>
+            <a:r>
+              <a:rPr lang="hu-HU" dirty="0" err="1" smtClean="0"/>
+              <a:t>by</a:t>
+            </a:r>
+            <a:r>
+              <a:rPr lang="hu-HU" dirty="0" smtClean="0"/>
+              <a:t> an API </a:t>
+            </a:r>
+            <a:r>
+              <a:rPr lang="hu-HU" dirty="0" err="1" smtClean="0"/>
+              <a:t>key</a:t>
             </a:r>
             <a:endParaRPr lang="en-US" dirty="0"/>
           </a:p>
@@ -3350,11 +3392,7 @@
             </a:r>
             <a:r>
               <a:rPr lang="hu-HU" dirty="0" smtClean="0"/>
-              <a:t> 3 – MCP </a:t>
-            </a:r>
-            <a:r>
-              <a:rPr lang="hu-HU" dirty="0" smtClean="0"/>
-              <a:t>Server </a:t>
+              <a:t> 3 – MCP Server </a:t>
             </a:r>
             <a:r>
               <a:rPr lang="hu-HU" dirty="0" err="1" smtClean="0"/>
@@ -3569,11 +3607,7 @@
             </a:r>
             <a:r>
               <a:rPr lang="hu-HU" dirty="0" smtClean="0"/>
-              <a:t> </a:t>
-            </a:r>
-            <a:r>
-              <a:rPr lang="hu-HU" dirty="0" smtClean="0"/>
-              <a:t>4</a:t>
+              <a:t> 4</a:t>
             </a:r>
             <a:endParaRPr lang="en-US" dirty="0"/>
           </a:p>
@@ -3591,7 +3625,9 @@
         </p:nvSpPr>
         <p:spPr/>
         <p:txBody>
-          <a:bodyPr/>
+          <a:bodyPr>
+            <a:normAutofit/>
+          </a:bodyPr>
           <a:lstStyle/>
           <a:p>
             <a:r>
@@ -3622,7 +3658,95 @@
               <a:rPr lang="hu-HU" dirty="0" err="1" smtClean="0"/>
               <a:t>langgraph</a:t>
             </a:r>
-            <a:endParaRPr lang="en-US" dirty="0"/>
+            <a:endParaRPr lang="hu-HU" dirty="0" smtClean="0"/>
+          </a:p>
+          <a:p>
+            <a:r>
+              <a:rPr lang="hu-HU" dirty="0" err="1" smtClean="0"/>
+              <a:t>There</a:t>
+            </a:r>
+            <a:r>
+              <a:rPr lang="hu-HU" dirty="0"/>
+              <a:t> </a:t>
+            </a:r>
+            <a:r>
+              <a:rPr lang="hu-HU" dirty="0" err="1" smtClean="0"/>
+              <a:t>are</a:t>
+            </a:r>
+            <a:r>
+              <a:rPr lang="hu-HU" dirty="0" smtClean="0"/>
+              <a:t> 3 </a:t>
+            </a:r>
+            <a:r>
+              <a:rPr lang="hu-HU" dirty="0" err="1" smtClean="0"/>
+              <a:t>nodes</a:t>
+            </a:r>
+            <a:endParaRPr lang="hu-HU" dirty="0"/>
+          </a:p>
+          <a:p>
+            <a:pPr lvl="1"/>
+            <a:r>
+              <a:rPr lang="hu-HU" dirty="0" err="1" smtClean="0"/>
+              <a:t>user_interaction_node</a:t>
+            </a:r>
+            <a:endParaRPr lang="hu-HU" dirty="0" smtClean="0"/>
+          </a:p>
+          <a:p>
+            <a:pPr lvl="1"/>
+            <a:r>
+              <a:rPr lang="hu-HU" dirty="0" err="1" smtClean="0"/>
+              <a:t>administrator_approval_node</a:t>
+            </a:r>
+            <a:endParaRPr lang="hu-HU" dirty="0" smtClean="0"/>
+          </a:p>
+          <a:p>
+            <a:pPr lvl="1"/>
+            <a:r>
+              <a:rPr lang="hu-HU" dirty="0" err="1" smtClean="0"/>
+              <a:t>data_recording_node</a:t>
+            </a:r>
+            <a:endParaRPr lang="hu-HU" dirty="0"/>
+          </a:p>
+          <a:p>
+            <a:r>
+              <a:rPr lang="en-US" dirty="0" smtClean="0"/>
+              <a:t>The </a:t>
+            </a:r>
+            <a:r>
+              <a:rPr lang="en-US" dirty="0"/>
+              <a:t>orchestration layer coordinates:</a:t>
+            </a:r>
+          </a:p>
+          <a:p>
+            <a:pPr lvl="1"/>
+            <a:r>
+              <a:rPr lang="en-US" dirty="0"/>
+              <a:t>reservation submission</a:t>
+            </a:r>
+          </a:p>
+          <a:p>
+            <a:pPr lvl="1"/>
+            <a:r>
+              <a:rPr lang="en-US" dirty="0"/>
+              <a:t>administrator notification</a:t>
+            </a:r>
+          </a:p>
+          <a:p>
+            <a:pPr lvl="1"/>
+            <a:r>
+              <a:rPr lang="en-US" dirty="0"/>
+              <a:t>reservation approval</a:t>
+            </a:r>
+          </a:p>
+          <a:p>
+            <a:pPr lvl="1"/>
+            <a:r>
+              <a:rPr lang="en-US" dirty="0"/>
+              <a:t>external reservation recording</a:t>
+            </a:r>
+          </a:p>
+          <a:p>
+            <a:endParaRPr lang="hu-HU" dirty="0"/>
           </a:p>
         </p:txBody>
       </p:sp>
@@ -4146,6 +4270,17 @@
             <a:endParaRPr lang="hu-HU" dirty="0"/>
           </a:p>
           <a:p>
+            <a:r>
+              <a:rPr lang="hu-HU" dirty="0" smtClean="0"/>
+              <a:t>LLM</a:t>
+            </a:r>
+          </a:p>
+          <a:p>
+            <a:pPr lvl="1"/>
+            <a:r>
+              <a:rPr lang="en-US" dirty="0"/>
+              <a:t>gpt-4o-mini</a:t>
+            </a:r>
             <a:endParaRPr lang="hu-HU" dirty="0" smtClean="0"/>
           </a:p>
           <a:p>
@@ -4745,19 +4880,7 @@
             </a:r>
             <a:r>
               <a:rPr lang="hu-HU" dirty="0" smtClean="0"/>
-              <a:t> </a:t>
-            </a:r>
-            <a:r>
-              <a:rPr lang="hu-HU" dirty="0" smtClean="0"/>
-              <a:t>1 </a:t>
-            </a:r>
-            <a:r>
-              <a:rPr lang="hu-HU" dirty="0" smtClean="0"/>
-              <a:t>– </a:t>
-            </a:r>
-            <a:r>
-              <a:rPr lang="hu-HU" dirty="0" smtClean="0"/>
-              <a:t>RAG </a:t>
+              <a:t> 1 – RAG </a:t>
             </a:r>
             <a:r>
               <a:rPr lang="hu-HU" dirty="0" err="1" smtClean="0"/>
@@ -4959,15 +5082,7 @@
             </a:r>
             <a:r>
               <a:rPr lang="hu-HU" dirty="0" smtClean="0"/>
-              <a:t> </a:t>
-            </a:r>
-            <a:r>
-              <a:rPr lang="hu-HU" dirty="0" smtClean="0"/>
-              <a:t>1 </a:t>
-            </a:r>
-            <a:r>
-              <a:rPr lang="hu-HU" dirty="0" smtClean="0"/>
-              <a:t>– </a:t>
+              <a:t> 1 – </a:t>
             </a:r>
             <a:r>
               <a:rPr lang="hu-HU" dirty="0" err="1" smtClean="0"/>
@@ -5103,11 +5218,7 @@
             </a:r>
             <a:r>
               <a:rPr lang="hu-HU" dirty="0" smtClean="0"/>
-              <a:t> </a:t>
-            </a:r>
-            <a:r>
-              <a:rPr lang="hu-HU" dirty="0" smtClean="0"/>
-              <a:t>2</a:t>
+              <a:t> 2</a:t>
             </a:r>
             <a:endParaRPr lang="en-US" dirty="0"/>
           </a:p>
@@ -5351,7 +5462,7 @@
       </p:sp>
       <p:pic>
         <p:nvPicPr>
-          <p:cNvPr id="5" name="Tartalom helye 4"/>
+          <p:cNvPr id="7" name="Tartalom helye 6"/>
           <p:cNvPicPr>
             <a:picLocks noGrp="1" noChangeAspect="1"/>
           </p:cNvPicPr>
@@ -5373,8 +5484,8 @@
         </p:blipFill>
         <p:spPr>
           <a:xfrm>
-            <a:off x="1174770" y="1825625"/>
-            <a:ext cx="9842460" cy="4351338"/>
+            <a:off x="1901609" y="1937438"/>
+            <a:ext cx="8388781" cy="4127712"/>
           </a:xfrm>
         </p:spPr>
       </p:pic>
